--- a/docs/presentation.pptx
+++ b/docs/presentation.pptx
@@ -5,7 +5,7 @@
     <p:sldMasterId id="2147483648" r:id="rId1"/>
   </p:sldMasterIdLst>
   <p:notesMasterIdLst>
-    <p:notesMasterId r:id="rId15"/>
+    <p:notesMasterId r:id="rId16"/>
   </p:notesMasterIdLst>
   <p:sldIdLst>
     <p:sldId id="256" r:id="rId2"/>
@@ -13,14 +13,15 @@
     <p:sldId id="258" r:id="rId4"/>
     <p:sldId id="259" r:id="rId5"/>
     <p:sldId id="260" r:id="rId6"/>
-    <p:sldId id="261" r:id="rId7"/>
-    <p:sldId id="269" r:id="rId8"/>
-    <p:sldId id="263" r:id="rId9"/>
-    <p:sldId id="262" r:id="rId10"/>
-    <p:sldId id="264" r:id="rId11"/>
-    <p:sldId id="265" r:id="rId12"/>
-    <p:sldId id="266" r:id="rId13"/>
-    <p:sldId id="267" r:id="rId14"/>
+    <p:sldId id="270" r:id="rId7"/>
+    <p:sldId id="261" r:id="rId8"/>
+    <p:sldId id="269" r:id="rId9"/>
+    <p:sldId id="263" r:id="rId10"/>
+    <p:sldId id="262" r:id="rId11"/>
+    <p:sldId id="264" r:id="rId12"/>
+    <p:sldId id="265" r:id="rId13"/>
+    <p:sldId id="266" r:id="rId14"/>
+    <p:sldId id="267" r:id="rId15"/>
   </p:sldIdLst>
   <p:sldSz cx="12192000" cy="6858000"/>
   <p:notesSz cx="6858000" cy="9144000"/>
@@ -129,6 +130,7 @@
             <p14:sldId id="258"/>
             <p14:sldId id="259"/>
             <p14:sldId id="260"/>
+            <p14:sldId id="270"/>
             <p14:sldId id="261"/>
             <p14:sldId id="269"/>
             <p14:sldId id="263"/>
@@ -230,7 +232,7 @@
           <a:p>
             <a:fld id="{42F69302-1092-43F1-AD33-56966B236632}" type="datetimeFigureOut">
               <a:rPr lang="ru-RU" smtClean="0"/>
-              <a:t>31.01.2026</a:t>
+              <a:t>06.02.2026</a:t>
             </a:fld>
             <a:endParaRPr lang="ru-RU"/>
           </a:p>
@@ -644,7 +646,7 @@
           <a:p>
             <a:fld id="{49AC610A-50D4-4F66-812A-C437D1924BDC}" type="datetime1">
               <a:rPr lang="ru-RU" smtClean="0"/>
-              <a:t>31.01.2026</a:t>
+              <a:t>06.02.2026</a:t>
             </a:fld>
             <a:endParaRPr lang="ru-RU"/>
           </a:p>
@@ -842,7 +844,7 @@
           <a:p>
             <a:fld id="{1239756E-C99D-44C9-ADCA-B11299855DF2}" type="datetime1">
               <a:rPr lang="ru-RU" smtClean="0"/>
-              <a:t>31.01.2026</a:t>
+              <a:t>06.02.2026</a:t>
             </a:fld>
             <a:endParaRPr lang="ru-RU"/>
           </a:p>
@@ -1050,7 +1052,7 @@
           <a:p>
             <a:fld id="{BFDE9757-8F7D-4102-9FDF-764CF8D22652}" type="datetime1">
               <a:rPr lang="ru-RU" smtClean="0"/>
-              <a:t>31.01.2026</a:t>
+              <a:t>06.02.2026</a:t>
             </a:fld>
             <a:endParaRPr lang="ru-RU"/>
           </a:p>
@@ -1248,7 +1250,7 @@
           <a:p>
             <a:fld id="{8AF461D5-04C4-457B-9DEA-C4DCDB99A3A2}" type="datetime1">
               <a:rPr lang="ru-RU" smtClean="0"/>
-              <a:t>31.01.2026</a:t>
+              <a:t>06.02.2026</a:t>
             </a:fld>
             <a:endParaRPr lang="ru-RU"/>
           </a:p>
@@ -1523,7 +1525,7 @@
           <a:p>
             <a:fld id="{894F9AB4-4D73-4A1D-A2D4-F6217E398539}" type="datetime1">
               <a:rPr lang="ru-RU" smtClean="0"/>
-              <a:t>31.01.2026</a:t>
+              <a:t>06.02.2026</a:t>
             </a:fld>
             <a:endParaRPr lang="ru-RU"/>
           </a:p>
@@ -1788,7 +1790,7 @@
           <a:p>
             <a:fld id="{952339A7-0AFD-4A33-B8BD-0608756B7FED}" type="datetime1">
               <a:rPr lang="ru-RU" smtClean="0"/>
-              <a:t>31.01.2026</a:t>
+              <a:t>06.02.2026</a:t>
             </a:fld>
             <a:endParaRPr lang="ru-RU"/>
           </a:p>
@@ -2200,7 +2202,7 @@
           <a:p>
             <a:fld id="{7E5DA67A-3C2F-4F44-B68B-9C57B6167FD3}" type="datetime1">
               <a:rPr lang="ru-RU" smtClean="0"/>
-              <a:t>31.01.2026</a:t>
+              <a:t>06.02.2026</a:t>
             </a:fld>
             <a:endParaRPr lang="ru-RU"/>
           </a:p>
@@ -2341,7 +2343,7 @@
           <a:p>
             <a:fld id="{24FE0432-4F8C-4B6B-BD54-CD7A476FAB0C}" type="datetime1">
               <a:rPr lang="ru-RU" smtClean="0"/>
-              <a:t>31.01.2026</a:t>
+              <a:t>06.02.2026</a:t>
             </a:fld>
             <a:endParaRPr lang="ru-RU"/>
           </a:p>
@@ -2454,7 +2456,7 @@
           <a:p>
             <a:fld id="{B53432F5-0E58-4C36-B784-1F63A34C3FCC}" type="datetime1">
               <a:rPr lang="ru-RU" smtClean="0"/>
-              <a:t>31.01.2026</a:t>
+              <a:t>06.02.2026</a:t>
             </a:fld>
             <a:endParaRPr lang="ru-RU"/>
           </a:p>
@@ -2765,7 +2767,7 @@
           <a:p>
             <a:fld id="{4382A4BF-B7FE-47C6-B542-68C72EF78418}" type="datetime1">
               <a:rPr lang="ru-RU" smtClean="0"/>
-              <a:t>31.01.2026</a:t>
+              <a:t>06.02.2026</a:t>
             </a:fld>
             <a:endParaRPr lang="ru-RU"/>
           </a:p>
@@ -3053,7 +3055,7 @@
           <a:p>
             <a:fld id="{DC0AE02B-1CE3-4BC8-BA2F-2CF667F89240}" type="datetime1">
               <a:rPr lang="ru-RU" smtClean="0"/>
-              <a:t>31.01.2026</a:t>
+              <a:t>06.02.2026</a:t>
             </a:fld>
             <a:endParaRPr lang="ru-RU"/>
           </a:p>
@@ -3294,7 +3296,7 @@
           <a:p>
             <a:fld id="{B58806A6-7CFD-4A5F-BBA5-2792B37E1C1D}" type="datetime1">
               <a:rPr lang="ru-RU" smtClean="0"/>
-              <a:t>31.01.2026</a:t>
+              <a:t>06.02.2026</a:t>
             </a:fld>
             <a:endParaRPr lang="ru-RU"/>
           </a:p>
@@ -3877,7 +3879,7 @@
           <p:cNvPr id="2" name="Заголовок 1">
             <a:extLst>
               <a:ext uri="{FF2B5EF4-FFF2-40B4-BE49-F238E27FC236}">
-                <a16:creationId xmlns:a16="http://schemas.microsoft.com/office/drawing/2014/main" id="{DF750AFD-AC3A-5359-A6ED-C6065DF0A9A4}"/>
+                <a16:creationId xmlns:a16="http://schemas.microsoft.com/office/drawing/2014/main" id="{061C59D8-FE4E-FAE7-43A0-CAA1D51C4582}"/>
               </a:ext>
             </a:extLst>
           </p:cNvPr>
@@ -3896,52 +3898,253 @@
             <a:pPr algn="ctr"/>
             <a:r>
               <a:rPr lang="ru-RU" dirty="0"/>
-              <a:t>Интерфейс и пример работы ПО</a:t>
+              <a:t>Диаграмма классов</a:t>
             </a:r>
           </a:p>
         </p:txBody>
       </p:sp>
       <p:pic>
         <p:nvPicPr>
-          <p:cNvPr id="5" name="Объект 4" descr="Изображение выглядит как снимок экрана, Мультимедийное программное обеспечение, программное обеспечение, Графическое программное обеспечение&#10;&#10;Содержимое, созданное искусственным интеллектом, может быть неверным.">
-            <a:extLst>
-              <a:ext uri="{FF2B5EF4-FFF2-40B4-BE49-F238E27FC236}">
-                <a16:creationId xmlns:a16="http://schemas.microsoft.com/office/drawing/2014/main" id="{19E45D08-F447-1A64-2824-A33CFED37552}"/>
+          <p:cNvPr id="5" name="Рисунок 4" descr="Изображение выглядит как текст, диаграмма, План, схематичный&#10;&#10;Содержимое, созданное искусственным интеллектом, может быть неверным.">
+            <a:extLst>
+              <a:ext uri="{FF2B5EF4-FFF2-40B4-BE49-F238E27FC236}">
+                <a16:creationId xmlns:a16="http://schemas.microsoft.com/office/drawing/2014/main" id="{7702CBC6-D261-E85D-0B4D-6CED728E7172}"/>
               </a:ext>
             </a:extLst>
           </p:cNvPr>
           <p:cNvPicPr>
-            <a:picLocks noGrp="1" noChangeAspect="1"/>
+            <a:picLocks noChangeAspect="1"/>
           </p:cNvPicPr>
-          <p:nvPr>
-            <p:ph idx="1"/>
-          </p:nvPr>
+          <p:nvPr/>
         </p:nvPicPr>
         <p:blipFill>
-          <a:blip r:embed="rId2">
-            <a:extLst>
-              <a:ext uri="{28A0092B-C50C-407E-A947-70E740481C1C}">
-                <a14:useLocalDpi xmlns:a14="http://schemas.microsoft.com/office/drawing/2010/main" val="0"/>
-              </a:ext>
-            </a:extLst>
-          </a:blip>
+          <a:blip r:embed="rId2"/>
+          <a:srcRect r="1156"/>
           <a:stretch>
             <a:fillRect/>
           </a:stretch>
         </p:blipFill>
         <p:spPr>
           <a:xfrm>
-            <a:off x="1854148" y="1743523"/>
-            <a:ext cx="8483703" cy="4559991"/>
+            <a:off x="5294086" y="1847088"/>
+            <a:ext cx="5989610" cy="4581144"/>
           </a:xfrm>
+          <a:prstGeom prst="rect">
+            <a:avLst/>
+          </a:prstGeom>
         </p:spPr>
       </p:pic>
       <p:sp>
         <p:nvSpPr>
+          <p:cNvPr id="7" name="TextBox 6">
+            <a:extLst>
+              <a:ext uri="{FF2B5EF4-FFF2-40B4-BE49-F238E27FC236}">
+                <a16:creationId xmlns:a16="http://schemas.microsoft.com/office/drawing/2014/main" id="{72F5C6AB-242A-A447-C178-A26A3592F772}"/>
+              </a:ext>
+            </a:extLst>
+          </p:cNvPr>
+          <p:cNvSpPr txBox="1"/>
+          <p:nvPr/>
+        </p:nvSpPr>
+        <p:spPr>
+          <a:xfrm>
+            <a:off x="838200" y="1847088"/>
+            <a:ext cx="3934968" cy="4458913"/>
+          </a:xfrm>
+          <a:prstGeom prst="rect">
+            <a:avLst/>
+          </a:prstGeom>
+          <a:noFill/>
+        </p:spPr>
+        <p:txBody>
+          <a:bodyPr wrap="square">
+            <a:spAutoFit/>
+          </a:bodyPr>
+          <a:lstStyle/>
+          <a:p>
+            <a:pPr>
+              <a:lnSpc>
+                <a:spcPts val="1650"/>
+              </a:lnSpc>
+              <a:buNone/>
+            </a:pPr>
+            <a:r>
+              <a:rPr lang="ru-RU" b="0" dirty="0">
+                <a:effectLst/>
+                <a:latin typeface="DinaRemasterII"/>
+              </a:rPr>
+              <a:t>Класс </a:t>
+            </a:r>
+            <a:r>
+              <a:rPr lang="ru-RU" b="1" i="1" dirty="0">
+                <a:effectLst/>
+                <a:latin typeface="DinaRemasterII"/>
+              </a:rPr>
+              <a:t>Scene</a:t>
+            </a:r>
+            <a:r>
+              <a:rPr lang="ru-RU" b="0" dirty="0">
+                <a:effectLst/>
+                <a:latin typeface="DinaRemasterII"/>
+              </a:rPr>
+              <a:t> предназначен для хранения геометрических объектов сцены и источников освещения.</a:t>
+            </a:r>
+            <a:endParaRPr lang="en-US" b="0" dirty="0">
+              <a:effectLst/>
+              <a:latin typeface="DinaRemasterII"/>
+            </a:endParaRPr>
+          </a:p>
+          <a:p>
+            <a:pPr>
+              <a:lnSpc>
+                <a:spcPts val="1650"/>
+              </a:lnSpc>
+              <a:buNone/>
+            </a:pPr>
+            <a:endParaRPr lang="en-US" dirty="0">
+              <a:latin typeface="DinaRemasterII"/>
+            </a:endParaRPr>
+          </a:p>
+          <a:p>
+            <a:pPr>
+              <a:lnSpc>
+                <a:spcPts val="1650"/>
+              </a:lnSpc>
+              <a:buNone/>
+            </a:pPr>
+            <a:r>
+              <a:rPr lang="ru-RU" b="0" dirty="0">
+                <a:effectLst/>
+                <a:latin typeface="DinaRemasterII"/>
+              </a:rPr>
+              <a:t>Класс </a:t>
+            </a:r>
+            <a:r>
+              <a:rPr lang="ru-RU" b="1" i="1" dirty="0">
+                <a:effectLst/>
+                <a:latin typeface="DinaRemasterII"/>
+              </a:rPr>
+              <a:t>Camera</a:t>
+            </a:r>
+            <a:r>
+              <a:rPr lang="ru-RU" b="0" dirty="0">
+                <a:effectLst/>
+                <a:latin typeface="DinaRemasterII"/>
+              </a:rPr>
+              <a:t> инкапсулирует логику работы камеры, включая ее положение и ориентацию.</a:t>
+            </a:r>
+            <a:endParaRPr lang="en-US" b="0" dirty="0">
+              <a:effectLst/>
+              <a:latin typeface="DinaRemasterII"/>
+            </a:endParaRPr>
+          </a:p>
+          <a:p>
+            <a:pPr>
+              <a:lnSpc>
+                <a:spcPts val="1650"/>
+              </a:lnSpc>
+              <a:buNone/>
+            </a:pPr>
+            <a:endParaRPr lang="en-US" b="0" dirty="0">
+              <a:effectLst/>
+              <a:latin typeface="DinaRemasterII"/>
+            </a:endParaRPr>
+          </a:p>
+          <a:p>
+            <a:pPr>
+              <a:lnSpc>
+                <a:spcPts val="1650"/>
+              </a:lnSpc>
+              <a:buNone/>
+            </a:pPr>
+            <a:r>
+              <a:rPr lang="ru-RU" b="0" dirty="0">
+                <a:effectLst/>
+                <a:latin typeface="DinaRemasterII"/>
+              </a:rPr>
+              <a:t>Класс </a:t>
+            </a:r>
+            <a:r>
+              <a:rPr lang="ru-RU" b="1" i="1" dirty="0">
+                <a:effectLst/>
+                <a:latin typeface="DinaRemasterII"/>
+              </a:rPr>
+              <a:t>Canvas</a:t>
+            </a:r>
+            <a:r>
+              <a:rPr lang="ru-RU" b="0" dirty="0">
+                <a:effectLst/>
+                <a:latin typeface="DinaRemasterII"/>
+              </a:rPr>
+              <a:t> используется для сохранения сгенерированного изображения.</a:t>
+            </a:r>
+            <a:endParaRPr lang="en-US" b="0" dirty="0">
+              <a:effectLst/>
+              <a:latin typeface="DinaRemasterII"/>
+            </a:endParaRPr>
+          </a:p>
+          <a:p>
+            <a:pPr>
+              <a:lnSpc>
+                <a:spcPts val="1650"/>
+              </a:lnSpc>
+              <a:buNone/>
+            </a:pPr>
+            <a:endParaRPr lang="en-US" b="0" dirty="0">
+              <a:effectLst/>
+              <a:latin typeface="DinaRemasterII"/>
+            </a:endParaRPr>
+          </a:p>
+          <a:p>
+            <a:pPr>
+              <a:lnSpc>
+                <a:spcPts val="1650"/>
+              </a:lnSpc>
+              <a:buNone/>
+            </a:pPr>
+            <a:r>
+              <a:rPr lang="ru-RU" b="0" dirty="0">
+                <a:effectLst/>
+                <a:latin typeface="DinaRemasterII"/>
+              </a:rPr>
+              <a:t>Класс </a:t>
+            </a:r>
+            <a:r>
+              <a:rPr lang="ru-RU" b="1" i="1" dirty="0">
+                <a:effectLst/>
+                <a:latin typeface="DinaRemasterII"/>
+              </a:rPr>
+              <a:t>Renderer</a:t>
+            </a:r>
+            <a:r>
+              <a:rPr lang="ru-RU" b="0" dirty="0">
+                <a:effectLst/>
+                <a:latin typeface="DinaRemasterII"/>
+              </a:rPr>
+              <a:t> осуществляет формирование изображения сцены (Scene) с позиции камеры (Camera) и записывает результат в выходной буфер (Canvas). Этот класс выполняет роль централь</a:t>
+            </a:r>
+            <a:r>
+              <a:rPr lang="ru-RU" dirty="0">
+                <a:latin typeface="DinaRemasterII"/>
+              </a:rPr>
+              <a:t>н</a:t>
+            </a:r>
+            <a:r>
+              <a:rPr lang="ru-RU" b="0" dirty="0">
+                <a:effectLst/>
+                <a:latin typeface="DinaRemasterII"/>
+              </a:rPr>
+              <a:t>ого модуля, обеспечивая взаимодействии всех остальных компонентов системы.</a:t>
+            </a:r>
+          </a:p>
+        </p:txBody>
+      </p:sp>
+      <p:sp>
+        <p:nvSpPr>
           <p:cNvPr id="6" name="Номер слайда 5">
             <a:extLst>
               <a:ext uri="{FF2B5EF4-FFF2-40B4-BE49-F238E27FC236}">
-                <a16:creationId xmlns:a16="http://schemas.microsoft.com/office/drawing/2014/main" id="{EAE113F0-DA3A-F3EE-BB49-839A7AE16907}"/>
+                <a16:creationId xmlns:a16="http://schemas.microsoft.com/office/drawing/2014/main" id="{D143E6EA-538A-5F39-9A44-746591DA2E8E}"/>
               </a:ext>
             </a:extLst>
           </p:cNvPr>
@@ -3968,7 +4171,7 @@
     </p:spTree>
     <p:extLst>
       <p:ext uri="{BB962C8B-B14F-4D97-AF65-F5344CB8AC3E}">
-        <p14:creationId xmlns:p14="http://schemas.microsoft.com/office/powerpoint/2010/main" val="3128845183"/>
+        <p14:creationId xmlns:p14="http://schemas.microsoft.com/office/powerpoint/2010/main" val="740036979"/>
       </p:ext>
     </p:extLst>
   </p:cSld>
@@ -4000,6 +4203,129 @@
           <p:cNvPr id="2" name="Заголовок 1">
             <a:extLst>
               <a:ext uri="{FF2B5EF4-FFF2-40B4-BE49-F238E27FC236}">
+                <a16:creationId xmlns:a16="http://schemas.microsoft.com/office/drawing/2014/main" id="{DF750AFD-AC3A-5359-A6ED-C6065DF0A9A4}"/>
+              </a:ext>
+            </a:extLst>
+          </p:cNvPr>
+          <p:cNvSpPr>
+            <a:spLocks noGrp="1"/>
+          </p:cNvSpPr>
+          <p:nvPr>
+            <p:ph type="title"/>
+          </p:nvPr>
+        </p:nvSpPr>
+        <p:spPr/>
+        <p:txBody>
+          <a:bodyPr/>
+          <a:lstStyle/>
+          <a:p>
+            <a:pPr algn="ctr"/>
+            <a:r>
+              <a:rPr lang="ru-RU" dirty="0"/>
+              <a:t>Интерфейс и пример работы ПО</a:t>
+            </a:r>
+          </a:p>
+        </p:txBody>
+      </p:sp>
+      <p:pic>
+        <p:nvPicPr>
+          <p:cNvPr id="5" name="Объект 4" descr="Изображение выглядит как снимок экрана, Мультимедийное программное обеспечение, программное обеспечение, Графическое программное обеспечение&#10;&#10;Содержимое, созданное искусственным интеллектом, может быть неверным.">
+            <a:extLst>
+              <a:ext uri="{FF2B5EF4-FFF2-40B4-BE49-F238E27FC236}">
+                <a16:creationId xmlns:a16="http://schemas.microsoft.com/office/drawing/2014/main" id="{19E45D08-F447-1A64-2824-A33CFED37552}"/>
+              </a:ext>
+            </a:extLst>
+          </p:cNvPr>
+          <p:cNvPicPr>
+            <a:picLocks noGrp="1" noChangeAspect="1"/>
+          </p:cNvPicPr>
+          <p:nvPr>
+            <p:ph idx="1"/>
+          </p:nvPr>
+        </p:nvPicPr>
+        <p:blipFill>
+          <a:blip r:embed="rId2">
+            <a:extLst>
+              <a:ext uri="{28A0092B-C50C-407E-A947-70E740481C1C}">
+                <a14:useLocalDpi xmlns:a14="http://schemas.microsoft.com/office/drawing/2010/main" val="0"/>
+              </a:ext>
+            </a:extLst>
+          </a:blip>
+          <a:stretch>
+            <a:fillRect/>
+          </a:stretch>
+        </p:blipFill>
+        <p:spPr>
+          <a:xfrm>
+            <a:off x="1854148" y="1743523"/>
+            <a:ext cx="8483703" cy="4559991"/>
+          </a:xfrm>
+        </p:spPr>
+      </p:pic>
+      <p:sp>
+        <p:nvSpPr>
+          <p:cNvPr id="6" name="Номер слайда 5">
+            <a:extLst>
+              <a:ext uri="{FF2B5EF4-FFF2-40B4-BE49-F238E27FC236}">
+                <a16:creationId xmlns:a16="http://schemas.microsoft.com/office/drawing/2014/main" id="{EAE113F0-DA3A-F3EE-BB49-839A7AE16907}"/>
+              </a:ext>
+            </a:extLst>
+          </p:cNvPr>
+          <p:cNvSpPr>
+            <a:spLocks noGrp="1"/>
+          </p:cNvSpPr>
+          <p:nvPr>
+            <p:ph type="sldNum" sz="quarter" idx="12"/>
+          </p:nvPr>
+        </p:nvSpPr>
+        <p:spPr/>
+        <p:txBody>
+          <a:bodyPr/>
+          <a:lstStyle/>
+          <a:p>
+            <a:fld id="{24A9D74F-141D-41EE-901B-47FF1BB5CC63}" type="slidenum">
+              <a:rPr lang="ru-RU" smtClean="0"/>
+              <a:t>11</a:t>
+            </a:fld>
+            <a:endParaRPr lang="ru-RU"/>
+          </a:p>
+        </p:txBody>
+      </p:sp>
+    </p:spTree>
+    <p:extLst>
+      <p:ext uri="{BB962C8B-B14F-4D97-AF65-F5344CB8AC3E}">
+        <p14:creationId xmlns:p14="http://schemas.microsoft.com/office/powerpoint/2010/main" val="3128845183"/>
+      </p:ext>
+    </p:extLst>
+  </p:cSld>
+  <p:clrMapOvr>
+    <a:masterClrMapping/>
+  </p:clrMapOvr>
+</p:sld>
+</file>
+
+<file path=ppt/slides/slide12.xml><?xml version="1.0" encoding="utf-8"?>
+<p:sld xmlns:a="http://schemas.openxmlformats.org/drawingml/2006/main" xmlns:r="http://schemas.openxmlformats.org/officeDocument/2006/relationships" xmlns:p="http://schemas.openxmlformats.org/presentationml/2006/main">
+  <p:cSld>
+    <p:spTree>
+      <p:nvGrpSpPr>
+        <p:cNvPr id="1" name=""/>
+        <p:cNvGrpSpPr/>
+        <p:nvPr/>
+      </p:nvGrpSpPr>
+      <p:grpSpPr>
+        <a:xfrm>
+          <a:off x="0" y="0"/>
+          <a:ext cx="0" cy="0"/>
+          <a:chOff x="0" y="0"/>
+          <a:chExt cx="0" cy="0"/>
+        </a:xfrm>
+      </p:grpSpPr>
+      <p:sp>
+        <p:nvSpPr>
+          <p:cNvPr id="2" name="Заголовок 1">
+            <a:extLst>
+              <a:ext uri="{FF2B5EF4-FFF2-40B4-BE49-F238E27FC236}">
                 <a16:creationId xmlns:a16="http://schemas.microsoft.com/office/drawing/2014/main" id="{68F6AF23-7BDE-9F39-1517-528D6F2B413C}"/>
               </a:ext>
             </a:extLst>
@@ -4511,7 +4837,7 @@
           <a:p>
             <a:fld id="{24A9D74F-141D-41EE-901B-47FF1BB5CC63}" type="slidenum">
               <a:rPr lang="ru-RU" smtClean="0"/>
-              <a:t>11</a:t>
+              <a:t>12</a:t>
             </a:fld>
             <a:endParaRPr lang="ru-RU"/>
           </a:p>
@@ -4738,7 +5064,7 @@
 </p:sld>
 </file>
 
-<file path=ppt/slides/slide12.xml><?xml version="1.0" encoding="utf-8"?>
+<file path=ppt/slides/slide13.xml><?xml version="1.0" encoding="utf-8"?>
 <p:sld xmlns:a="http://schemas.openxmlformats.org/drawingml/2006/main" xmlns:r="http://schemas.openxmlformats.org/officeDocument/2006/relationships" xmlns:p="http://schemas.openxmlformats.org/presentationml/2006/main">
   <p:cSld>
     <p:spTree>
@@ -5442,7 +5768,7 @@
           <a:p>
             <a:fld id="{24A9D74F-141D-41EE-901B-47FF1BB5CC63}" type="slidenum">
               <a:rPr lang="ru-RU" smtClean="0"/>
-              <a:t>12</a:t>
+              <a:t>13</a:t>
             </a:fld>
             <a:endParaRPr lang="ru-RU"/>
           </a:p>
@@ -5461,7 +5787,7 @@
 </p:sld>
 </file>
 
-<file path=ppt/slides/slide13.xml><?xml version="1.0" encoding="utf-8"?>
+<file path=ppt/slides/slide14.xml><?xml version="1.0" encoding="utf-8"?>
 <p:sld xmlns:a="http://schemas.openxmlformats.org/drawingml/2006/main" xmlns:r="http://schemas.openxmlformats.org/officeDocument/2006/relationships" xmlns:p="http://schemas.openxmlformats.org/presentationml/2006/main">
   <p:cSld>
     <p:spTree>
@@ -5593,7 +5919,7 @@
           <a:p>
             <a:fld id="{24A9D74F-141D-41EE-901B-47FF1BB5CC63}" type="slidenum">
               <a:rPr lang="ru-RU" smtClean="0"/>
-              <a:t>13</a:t>
+              <a:t>14</a:t>
             </a:fld>
             <a:endParaRPr lang="ru-RU"/>
           </a:p>
@@ -5935,10 +6261,13 @@
             </a:r>
           </a:p>
           <a:p>
-            <a:pPr lvl="1"/>
+            <a:pPr marL="285750" indent="-285750">
+              <a:buFont typeface="Arial" panose="020B0604020202020204" pitchFamily="34" charset="0"/>
+              <a:buChar char="•"/>
+            </a:pPr>
             <a:r>
               <a:rPr lang="ru-RU" dirty="0"/>
-              <a:t>Отражаться</a:t>
+              <a:t>рассеиваться</a:t>
             </a:r>
             <a:r>
               <a:rPr lang="en-US" dirty="0"/>
@@ -5946,10 +6275,13 @@
             </a:r>
           </a:p>
           <a:p>
-            <a:pPr lvl="1"/>
+            <a:pPr marL="285750" indent="-285750">
+              <a:buFont typeface="Arial" panose="020B0604020202020204" pitchFamily="34" charset="0"/>
+              <a:buChar char="•"/>
+            </a:pPr>
             <a:r>
               <a:rPr lang="ru-RU" dirty="0"/>
-              <a:t>Преломляться</a:t>
+              <a:t>отражаться</a:t>
             </a:r>
             <a:r>
               <a:rPr lang="en-US" dirty="0"/>
@@ -5957,10 +6289,13 @@
             </a:r>
           </a:p>
           <a:p>
-            <a:pPr lvl="1"/>
+            <a:pPr marL="285750" indent="-285750">
+              <a:buFont typeface="Arial" panose="020B0604020202020204" pitchFamily="34" charset="0"/>
+              <a:buChar char="•"/>
+            </a:pPr>
             <a:r>
               <a:rPr lang="ru-RU" dirty="0"/>
-              <a:t>Поглощаться</a:t>
+              <a:t>преломляться</a:t>
             </a:r>
             <a:r>
               <a:rPr lang="en-US" dirty="0"/>
@@ -5968,14 +6303,15 @@
             </a:r>
           </a:p>
           <a:p>
-            <a:pPr lvl="1"/>
+            <a:pPr marL="285750" indent="-285750">
+              <a:buFont typeface="Arial" panose="020B0604020202020204" pitchFamily="34" charset="0"/>
+              <a:buChar char="•"/>
+            </a:pPr>
             <a:r>
               <a:rPr lang="ru-RU" dirty="0"/>
-              <a:t>рассеиваться.</a:t>
-            </a:r>
-          </a:p>
-          <a:p>
-            <a:endParaRPr lang="ru-RU" dirty="0"/>
+              <a:t>поглощаться.</a:t>
+            </a:r>
+            <a:endParaRPr lang="en-US" dirty="0"/>
           </a:p>
         </p:txBody>
       </p:sp>
@@ -6663,6 +6999,130 @@
           <p:cNvPr id="2" name="Заголовок 1">
             <a:extLst>
               <a:ext uri="{FF2B5EF4-FFF2-40B4-BE49-F238E27FC236}">
+                <a16:creationId xmlns:a16="http://schemas.microsoft.com/office/drawing/2014/main" id="{CDB18F33-AE78-DF53-0A5D-2352B8E2AC00}"/>
+              </a:ext>
+            </a:extLst>
+          </p:cNvPr>
+          <p:cNvSpPr>
+            <a:spLocks noGrp="1"/>
+          </p:cNvSpPr>
+          <p:nvPr>
+            <p:ph type="title"/>
+          </p:nvPr>
+        </p:nvSpPr>
+        <p:spPr/>
+        <p:txBody>
+          <a:bodyPr/>
+          <a:lstStyle/>
+          <a:p>
+            <a:pPr algn="ctr"/>
+            <a:r>
+              <a:rPr lang="en-US" dirty="0"/>
+              <a:t>IDEF0 </a:t>
+            </a:r>
+            <a:r>
+              <a:rPr lang="ru-RU" dirty="0"/>
+              <a:t>диаграмма трассировки лучей</a:t>
+            </a:r>
+          </a:p>
+        </p:txBody>
+      </p:sp>
+      <p:pic>
+        <p:nvPicPr>
+          <p:cNvPr id="5" name="Объект 4">
+            <a:extLst>
+              <a:ext uri="{FF2B5EF4-FFF2-40B4-BE49-F238E27FC236}">
+                <a16:creationId xmlns:a16="http://schemas.microsoft.com/office/drawing/2014/main" id="{06A267C5-8144-4DE0-1594-6D20E9088B5A}"/>
+              </a:ext>
+            </a:extLst>
+          </p:cNvPr>
+          <p:cNvPicPr>
+            <a:picLocks noGrp="1" noChangeAspect="1"/>
+          </p:cNvPicPr>
+          <p:nvPr>
+            <p:ph idx="1"/>
+          </p:nvPr>
+        </p:nvPicPr>
+        <p:blipFill>
+          <a:blip r:embed="rId2"/>
+          <a:stretch>
+            <a:fillRect/>
+          </a:stretch>
+        </p:blipFill>
+        <p:spPr>
+          <a:xfrm>
+            <a:off x="1089130" y="1880763"/>
+            <a:ext cx="10013740" cy="3096473"/>
+          </a:xfrm>
+          <a:prstGeom prst="rect">
+            <a:avLst/>
+          </a:prstGeom>
+        </p:spPr>
+      </p:pic>
+      <p:sp>
+        <p:nvSpPr>
+          <p:cNvPr id="4" name="Номер слайда 3">
+            <a:extLst>
+              <a:ext uri="{FF2B5EF4-FFF2-40B4-BE49-F238E27FC236}">
+                <a16:creationId xmlns:a16="http://schemas.microsoft.com/office/drawing/2014/main" id="{BB87F1DD-88B8-BBC7-E3FC-3F333B9FFB68}"/>
+              </a:ext>
+            </a:extLst>
+          </p:cNvPr>
+          <p:cNvSpPr>
+            <a:spLocks noGrp="1"/>
+          </p:cNvSpPr>
+          <p:nvPr>
+            <p:ph type="sldNum" sz="quarter" idx="12"/>
+          </p:nvPr>
+        </p:nvSpPr>
+        <p:spPr/>
+        <p:txBody>
+          <a:bodyPr/>
+          <a:lstStyle/>
+          <a:p>
+            <a:fld id="{24A9D74F-141D-41EE-901B-47FF1BB5CC63}" type="slidenum">
+              <a:rPr lang="ru-RU" smtClean="0"/>
+              <a:t>6</a:t>
+            </a:fld>
+            <a:endParaRPr lang="ru-RU"/>
+          </a:p>
+        </p:txBody>
+      </p:sp>
+    </p:spTree>
+    <p:extLst>
+      <p:ext uri="{BB962C8B-B14F-4D97-AF65-F5344CB8AC3E}">
+        <p14:creationId xmlns:p14="http://schemas.microsoft.com/office/powerpoint/2010/main" val="4271873731"/>
+      </p:ext>
+    </p:extLst>
+  </p:cSld>
+  <p:clrMapOvr>
+    <a:masterClrMapping/>
+  </p:clrMapOvr>
+</p:sld>
+</file>
+
+<file path=ppt/slides/slide7.xml><?xml version="1.0" encoding="utf-8"?>
+<p:sld xmlns:a="http://schemas.openxmlformats.org/drawingml/2006/main" xmlns:r="http://schemas.openxmlformats.org/officeDocument/2006/relationships" xmlns:p="http://schemas.openxmlformats.org/presentationml/2006/main">
+  <p:cSld>
+    <p:spTree>
+      <p:nvGrpSpPr>
+        <p:cNvPr id="1" name=""/>
+        <p:cNvGrpSpPr/>
+        <p:nvPr/>
+      </p:nvGrpSpPr>
+      <p:grpSpPr>
+        <a:xfrm>
+          <a:off x="0" y="0"/>
+          <a:ext cx="0" cy="0"/>
+          <a:chOff x="0" y="0"/>
+          <a:chExt cx="0" cy="0"/>
+        </a:xfrm>
+      </p:grpSpPr>
+      <p:sp>
+        <p:nvSpPr>
+          <p:cNvPr id="2" name="Заголовок 1">
+            <a:extLst>
+              <a:ext uri="{FF2B5EF4-FFF2-40B4-BE49-F238E27FC236}">
                 <a16:creationId xmlns:a16="http://schemas.microsoft.com/office/drawing/2014/main" id="{6EE4DF18-E554-0B20-C84B-F68D3E71D42A}"/>
               </a:ext>
             </a:extLst>
@@ -6724,7 +7184,7 @@
           <a:p>
             <a:fld id="{24A9D74F-141D-41EE-901B-47FF1BB5CC63}" type="slidenum">
               <a:rPr lang="ru-RU" smtClean="0"/>
-              <a:t>6</a:t>
+              <a:t>7</a:t>
             </a:fld>
             <a:endParaRPr lang="ru-RU"/>
           </a:p>
@@ -6779,7 +7239,7 @@
 </p:sld>
 </file>
 
-<file path=ppt/slides/slide7.xml><?xml version="1.0" encoding="utf-8"?>
+<file path=ppt/slides/slide8.xml><?xml version="1.0" encoding="utf-8"?>
 <p:sld xmlns:a="http://schemas.openxmlformats.org/drawingml/2006/main" xmlns:r="http://schemas.openxmlformats.org/officeDocument/2006/relationships" xmlns:p="http://schemas.openxmlformats.org/presentationml/2006/main">
   <p:cSld>
     <p:spTree>
@@ -6868,7 +7328,7 @@
           <a:p>
             <a:fld id="{24A9D74F-141D-41EE-901B-47FF1BB5CC63}" type="slidenum">
               <a:rPr lang="ru-RU" smtClean="0"/>
-              <a:t>7</a:t>
+              <a:t>8</a:t>
             </a:fld>
             <a:endParaRPr lang="ru-RU"/>
           </a:p>
@@ -6923,224 +7383,6 @@
 </p:sld>
 </file>
 
-<file path=ppt/slides/slide8.xml><?xml version="1.0" encoding="utf-8"?>
-<p:sld xmlns:a="http://schemas.openxmlformats.org/drawingml/2006/main" xmlns:r="http://schemas.openxmlformats.org/officeDocument/2006/relationships" xmlns:p="http://schemas.openxmlformats.org/presentationml/2006/main">
-  <p:cSld>
-    <p:spTree>
-      <p:nvGrpSpPr>
-        <p:cNvPr id="1" name=""/>
-        <p:cNvGrpSpPr/>
-        <p:nvPr/>
-      </p:nvGrpSpPr>
-      <p:grpSpPr>
-        <a:xfrm>
-          <a:off x="0" y="0"/>
-          <a:ext cx="0" cy="0"/>
-          <a:chOff x="0" y="0"/>
-          <a:chExt cx="0" cy="0"/>
-        </a:xfrm>
-      </p:grpSpPr>
-      <p:sp>
-        <p:nvSpPr>
-          <p:cNvPr id="2" name="Заголовок 1">
-            <a:extLst>
-              <a:ext uri="{FF2B5EF4-FFF2-40B4-BE49-F238E27FC236}">
-                <a16:creationId xmlns:a16="http://schemas.microsoft.com/office/drawing/2014/main" id="{8CC70739-AB7D-1151-62FB-E6D1A5DEF9EA}"/>
-              </a:ext>
-            </a:extLst>
-          </p:cNvPr>
-          <p:cNvSpPr>
-            <a:spLocks noGrp="1"/>
-          </p:cNvSpPr>
-          <p:nvPr>
-            <p:ph type="title"/>
-          </p:nvPr>
-        </p:nvSpPr>
-        <p:spPr/>
-        <p:txBody>
-          <a:bodyPr/>
-          <a:lstStyle/>
-          <a:p>
-            <a:pPr algn="ctr"/>
-            <a:r>
-              <a:rPr lang="ru-RU" dirty="0"/>
-              <a:t>Требования к ПО и средства реализации</a:t>
-            </a:r>
-          </a:p>
-        </p:txBody>
-      </p:sp>
-      <p:sp>
-        <p:nvSpPr>
-          <p:cNvPr id="3" name="Объект 2">
-            <a:extLst>
-              <a:ext uri="{FF2B5EF4-FFF2-40B4-BE49-F238E27FC236}">
-                <a16:creationId xmlns:a16="http://schemas.microsoft.com/office/drawing/2014/main" id="{F35E33DA-2A5B-408C-1C7B-925B79DDE658}"/>
-              </a:ext>
-            </a:extLst>
-          </p:cNvPr>
-          <p:cNvSpPr>
-            <a:spLocks noGrp="1"/>
-          </p:cNvSpPr>
-          <p:nvPr>
-            <p:ph idx="1"/>
-          </p:nvPr>
-        </p:nvSpPr>
-        <p:spPr/>
-        <p:txBody>
-          <a:bodyPr>
-            <a:normAutofit fontScale="92500"/>
-          </a:bodyPr>
-          <a:lstStyle/>
-          <a:p>
-            <a:pPr marL="0" indent="0">
-              <a:buNone/>
-            </a:pPr>
-            <a:r>
-              <a:rPr lang="ru-RU" dirty="0"/>
-              <a:t>Разрабатываемое ПО должно обладать следующим функционалом:</a:t>
-            </a:r>
-          </a:p>
-          <a:p>
-            <a:pPr lvl="1"/>
-            <a:r>
-              <a:rPr lang="ru-RU" dirty="0"/>
-              <a:t>добавление и удаление объектов;</a:t>
-            </a:r>
-          </a:p>
-          <a:p>
-            <a:pPr lvl="1"/>
-            <a:r>
-              <a:rPr lang="ru-RU" dirty="0"/>
-              <a:t>изменение положения, ориентации, масштаба и цвета объектов;</a:t>
-            </a:r>
-          </a:p>
-          <a:p>
-            <a:pPr lvl="1"/>
-            <a:r>
-              <a:rPr lang="ru-RU" dirty="0"/>
-              <a:t>изменение положения и ориентации камеры;</a:t>
-            </a:r>
-          </a:p>
-          <a:p>
-            <a:pPr lvl="1"/>
-            <a:r>
-              <a:rPr lang="ru-RU" dirty="0"/>
-              <a:t>добавление и удаление источников освещения;</a:t>
-            </a:r>
-          </a:p>
-          <a:p>
-            <a:pPr lvl="1"/>
-            <a:r>
-              <a:rPr lang="ru-RU" dirty="0"/>
-              <a:t>изменение положения, ориентации и цвета источников освещения</a:t>
-            </a:r>
-            <a:r>
-              <a:rPr lang="en-US" dirty="0"/>
-              <a:t>.</a:t>
-            </a:r>
-          </a:p>
-          <a:p>
-            <a:pPr marL="457200" lvl="1" indent="0">
-              <a:buNone/>
-            </a:pPr>
-            <a:endParaRPr lang="ru-RU" dirty="0"/>
-          </a:p>
-          <a:p>
-            <a:pPr marL="0" indent="0">
-              <a:buNone/>
-            </a:pPr>
-            <a:r>
-              <a:rPr lang="ru-RU" dirty="0"/>
-              <a:t>Средства реализации</a:t>
-            </a:r>
-            <a:r>
-              <a:rPr lang="en-US" dirty="0"/>
-              <a:t>:</a:t>
-            </a:r>
-            <a:endParaRPr lang="ru-RU" dirty="0"/>
-          </a:p>
-          <a:p>
-            <a:pPr lvl="1"/>
-            <a:r>
-              <a:rPr lang="ru-RU" dirty="0"/>
-              <a:t>Язык программирования</a:t>
-            </a:r>
-            <a:r>
-              <a:rPr lang="en-US" dirty="0"/>
-              <a:t>: C++</a:t>
-            </a:r>
-          </a:p>
-          <a:p>
-            <a:pPr lvl="1"/>
-            <a:r>
-              <a:rPr lang="ru-RU" dirty="0"/>
-              <a:t>Графическая библиотека</a:t>
-            </a:r>
-            <a:r>
-              <a:rPr lang="en-US" dirty="0"/>
-              <a:t>: SFML</a:t>
-            </a:r>
-          </a:p>
-          <a:p>
-            <a:pPr lvl="1"/>
-            <a:r>
-              <a:rPr lang="en-US" dirty="0"/>
-              <a:t>GUI </a:t>
-            </a:r>
-            <a:r>
-              <a:rPr lang="ru-RU" dirty="0"/>
-              <a:t>библиотека</a:t>
-            </a:r>
-            <a:r>
-              <a:rPr lang="en-US" dirty="0"/>
-              <a:t>: Dear ImGui</a:t>
-            </a:r>
-            <a:endParaRPr lang="ru-RU" dirty="0"/>
-          </a:p>
-        </p:txBody>
-      </p:sp>
-      <p:sp>
-        <p:nvSpPr>
-          <p:cNvPr id="6" name="Номер слайда 5">
-            <a:extLst>
-              <a:ext uri="{FF2B5EF4-FFF2-40B4-BE49-F238E27FC236}">
-                <a16:creationId xmlns:a16="http://schemas.microsoft.com/office/drawing/2014/main" id="{1705C54C-2674-CAF6-8EA7-E630AC9F846F}"/>
-              </a:ext>
-            </a:extLst>
-          </p:cNvPr>
-          <p:cNvSpPr>
-            <a:spLocks noGrp="1"/>
-          </p:cNvSpPr>
-          <p:nvPr>
-            <p:ph type="sldNum" sz="quarter" idx="12"/>
-          </p:nvPr>
-        </p:nvSpPr>
-        <p:spPr/>
-        <p:txBody>
-          <a:bodyPr/>
-          <a:lstStyle/>
-          <a:p>
-            <a:fld id="{24A9D74F-141D-41EE-901B-47FF1BB5CC63}" type="slidenum">
-              <a:rPr lang="ru-RU" smtClean="0"/>
-              <a:t>8</a:t>
-            </a:fld>
-            <a:endParaRPr lang="ru-RU"/>
-          </a:p>
-        </p:txBody>
-      </p:sp>
-    </p:spTree>
-    <p:extLst>
-      <p:ext uri="{BB962C8B-B14F-4D97-AF65-F5344CB8AC3E}">
-        <p14:creationId xmlns:p14="http://schemas.microsoft.com/office/powerpoint/2010/main" val="242748196"/>
-      </p:ext>
-    </p:extLst>
-  </p:cSld>
-  <p:clrMapOvr>
-    <a:masterClrMapping/>
-  </p:clrMapOvr>
-</p:sld>
-</file>
-
 <file path=ppt/slides/slide9.xml><?xml version="1.0" encoding="utf-8"?>
 <p:sld xmlns:a="http://schemas.openxmlformats.org/drawingml/2006/main" xmlns:r="http://schemas.openxmlformats.org/officeDocument/2006/relationships" xmlns:p="http://schemas.openxmlformats.org/presentationml/2006/main">
   <p:cSld>
@@ -7163,7 +7405,7 @@
           <p:cNvPr id="2" name="Заголовок 1">
             <a:extLst>
               <a:ext uri="{FF2B5EF4-FFF2-40B4-BE49-F238E27FC236}">
-                <a16:creationId xmlns:a16="http://schemas.microsoft.com/office/drawing/2014/main" id="{061C59D8-FE4E-FAE7-43A0-CAA1D51C4582}"/>
+                <a16:creationId xmlns:a16="http://schemas.microsoft.com/office/drawing/2014/main" id="{8CC70739-AB7D-1151-62FB-E6D1A5DEF9EA}"/>
               </a:ext>
             </a:extLst>
           </p:cNvPr>
@@ -7182,244 +7424,138 @@
             <a:pPr algn="ctr"/>
             <a:r>
               <a:rPr lang="ru-RU" dirty="0"/>
-              <a:t>Диаграмма классов</a:t>
-            </a:r>
-          </a:p>
-        </p:txBody>
-      </p:sp>
-      <p:pic>
-        <p:nvPicPr>
-          <p:cNvPr id="5" name="Рисунок 4" descr="Изображение выглядит как текст, диаграмма, План, схематичный&#10;&#10;Содержимое, созданное искусственным интеллектом, может быть неверным.">
-            <a:extLst>
-              <a:ext uri="{FF2B5EF4-FFF2-40B4-BE49-F238E27FC236}">
-                <a16:creationId xmlns:a16="http://schemas.microsoft.com/office/drawing/2014/main" id="{7702CBC6-D261-E85D-0B4D-6CED728E7172}"/>
-              </a:ext>
-            </a:extLst>
-          </p:cNvPr>
-          <p:cNvPicPr>
-            <a:picLocks noChangeAspect="1"/>
-          </p:cNvPicPr>
-          <p:nvPr/>
-        </p:nvPicPr>
-        <p:blipFill>
-          <a:blip r:embed="rId2"/>
-          <a:srcRect r="1156"/>
-          <a:stretch>
-            <a:fillRect/>
-          </a:stretch>
-        </p:blipFill>
-        <p:spPr>
-          <a:xfrm>
-            <a:off x="5294086" y="1847088"/>
-            <a:ext cx="5989610" cy="4581144"/>
-          </a:xfrm>
-          <a:prstGeom prst="rect">
-            <a:avLst/>
-          </a:prstGeom>
-        </p:spPr>
-      </p:pic>
-      <p:sp>
-        <p:nvSpPr>
-          <p:cNvPr id="7" name="TextBox 6">
-            <a:extLst>
-              <a:ext uri="{FF2B5EF4-FFF2-40B4-BE49-F238E27FC236}">
-                <a16:creationId xmlns:a16="http://schemas.microsoft.com/office/drawing/2014/main" id="{72F5C6AB-242A-A447-C178-A26A3592F772}"/>
-              </a:ext>
-            </a:extLst>
-          </p:cNvPr>
-          <p:cNvSpPr txBox="1"/>
-          <p:nvPr/>
-        </p:nvSpPr>
-        <p:spPr>
-          <a:xfrm>
-            <a:off x="838200" y="1847088"/>
-            <a:ext cx="3934968" cy="4458913"/>
-          </a:xfrm>
-          <a:prstGeom prst="rect">
-            <a:avLst/>
-          </a:prstGeom>
-          <a:noFill/>
-        </p:spPr>
-        <p:txBody>
-          <a:bodyPr wrap="square">
-            <a:spAutoFit/>
+              <a:t>Требования к ПО и средства реализации</a:t>
+            </a:r>
+          </a:p>
+        </p:txBody>
+      </p:sp>
+      <p:sp>
+        <p:nvSpPr>
+          <p:cNvPr id="3" name="Объект 2">
+            <a:extLst>
+              <a:ext uri="{FF2B5EF4-FFF2-40B4-BE49-F238E27FC236}">
+                <a16:creationId xmlns:a16="http://schemas.microsoft.com/office/drawing/2014/main" id="{F35E33DA-2A5B-408C-1C7B-925B79DDE658}"/>
+              </a:ext>
+            </a:extLst>
+          </p:cNvPr>
+          <p:cNvSpPr>
+            <a:spLocks noGrp="1"/>
+          </p:cNvSpPr>
+          <p:nvPr>
+            <p:ph idx="1"/>
+          </p:nvPr>
+        </p:nvSpPr>
+        <p:spPr/>
+        <p:txBody>
+          <a:bodyPr>
+            <a:normAutofit fontScale="92500"/>
           </a:bodyPr>
           <a:lstStyle/>
           <a:p>
-            <a:pPr>
-              <a:lnSpc>
-                <a:spcPts val="1650"/>
-              </a:lnSpc>
+            <a:pPr marL="0" indent="0">
               <a:buNone/>
             </a:pPr>
             <a:r>
-              <a:rPr lang="ru-RU" b="0" dirty="0">
-                <a:effectLst/>
-                <a:latin typeface="DinaRemasterII"/>
-              </a:rPr>
-              <a:t>Класс </a:t>
-            </a:r>
-            <a:r>
-              <a:rPr lang="ru-RU" b="1" i="1" dirty="0">
-                <a:effectLst/>
-                <a:latin typeface="DinaRemasterII"/>
-              </a:rPr>
-              <a:t>Scene</a:t>
-            </a:r>
-            <a:r>
-              <a:rPr lang="ru-RU" b="0" dirty="0">
-                <a:effectLst/>
-                <a:latin typeface="DinaRemasterII"/>
-              </a:rPr>
-              <a:t> предназначен для хранения геометрических объектов сцены и источников освещения.</a:t>
-            </a:r>
-            <a:endParaRPr lang="en-US" b="0" dirty="0">
-              <a:effectLst/>
-              <a:latin typeface="DinaRemasterII"/>
-            </a:endParaRPr>
-          </a:p>
-          <a:p>
-            <a:pPr>
-              <a:lnSpc>
-                <a:spcPts val="1650"/>
-              </a:lnSpc>
+              <a:rPr lang="ru-RU" dirty="0"/>
+              <a:t>Разрабатываемое ПО должно обладать следующим функционалом:</a:t>
+            </a:r>
+          </a:p>
+          <a:p>
+            <a:pPr lvl="1"/>
+            <a:r>
+              <a:rPr lang="ru-RU" dirty="0"/>
+              <a:t>добавление и удаление объектов;</a:t>
+            </a:r>
+          </a:p>
+          <a:p>
+            <a:pPr lvl="1"/>
+            <a:r>
+              <a:rPr lang="ru-RU" dirty="0"/>
+              <a:t>изменение положения, ориентации, масштаба и цвета объектов;</a:t>
+            </a:r>
+          </a:p>
+          <a:p>
+            <a:pPr lvl="1"/>
+            <a:r>
+              <a:rPr lang="ru-RU" dirty="0"/>
+              <a:t>изменение положения и ориентации камеры;</a:t>
+            </a:r>
+          </a:p>
+          <a:p>
+            <a:pPr lvl="1"/>
+            <a:r>
+              <a:rPr lang="ru-RU" dirty="0"/>
+              <a:t>добавление и удаление источников освещения;</a:t>
+            </a:r>
+          </a:p>
+          <a:p>
+            <a:pPr lvl="1"/>
+            <a:r>
+              <a:rPr lang="ru-RU" dirty="0"/>
+              <a:t>изменение положения, ориентации и цвета источников освещения</a:t>
+            </a:r>
+            <a:r>
+              <a:rPr lang="en-US" dirty="0"/>
+              <a:t>.</a:t>
+            </a:r>
+          </a:p>
+          <a:p>
+            <a:pPr marL="457200" lvl="1" indent="0">
               <a:buNone/>
             </a:pPr>
-            <a:endParaRPr lang="en-US" dirty="0">
-              <a:latin typeface="DinaRemasterII"/>
-            </a:endParaRPr>
-          </a:p>
-          <a:p>
-            <a:pPr>
-              <a:lnSpc>
-                <a:spcPts val="1650"/>
-              </a:lnSpc>
+            <a:endParaRPr lang="ru-RU" dirty="0"/>
+          </a:p>
+          <a:p>
+            <a:pPr marL="0" indent="0">
               <a:buNone/>
             </a:pPr>
             <a:r>
-              <a:rPr lang="ru-RU" b="0" dirty="0">
-                <a:effectLst/>
-                <a:latin typeface="DinaRemasterII"/>
-              </a:rPr>
-              <a:t>Класс </a:t>
-            </a:r>
-            <a:r>
-              <a:rPr lang="ru-RU" b="1" i="1" dirty="0">
-                <a:effectLst/>
-                <a:latin typeface="DinaRemasterII"/>
-              </a:rPr>
-              <a:t>Camera</a:t>
-            </a:r>
-            <a:r>
-              <a:rPr lang="ru-RU" b="0" dirty="0">
-                <a:effectLst/>
-                <a:latin typeface="DinaRemasterII"/>
-              </a:rPr>
-              <a:t> инкапсулирует логику работы камеры, включая ее положение и ориентацию.</a:t>
-            </a:r>
-            <a:endParaRPr lang="en-US" b="0" dirty="0">
-              <a:effectLst/>
-              <a:latin typeface="DinaRemasterII"/>
-            </a:endParaRPr>
-          </a:p>
-          <a:p>
-            <a:pPr>
-              <a:lnSpc>
-                <a:spcPts val="1650"/>
-              </a:lnSpc>
-              <a:buNone/>
-            </a:pPr>
-            <a:endParaRPr lang="en-US" b="0" dirty="0">
-              <a:effectLst/>
-              <a:latin typeface="DinaRemasterII"/>
-            </a:endParaRPr>
-          </a:p>
-          <a:p>
-            <a:pPr>
-              <a:lnSpc>
-                <a:spcPts val="1650"/>
-              </a:lnSpc>
-              <a:buNone/>
-            </a:pPr>
-            <a:r>
-              <a:rPr lang="ru-RU" b="0" dirty="0">
-                <a:effectLst/>
-                <a:latin typeface="DinaRemasterII"/>
-              </a:rPr>
-              <a:t>Класс </a:t>
-            </a:r>
-            <a:r>
-              <a:rPr lang="ru-RU" b="1" i="1" dirty="0">
-                <a:effectLst/>
-                <a:latin typeface="DinaRemasterII"/>
-              </a:rPr>
-              <a:t>Canvas</a:t>
-            </a:r>
-            <a:r>
-              <a:rPr lang="ru-RU" b="0" dirty="0">
-                <a:effectLst/>
-                <a:latin typeface="DinaRemasterII"/>
-              </a:rPr>
-              <a:t> используется для сохранения сгенерированного изображения.</a:t>
-            </a:r>
-            <a:endParaRPr lang="en-US" b="0" dirty="0">
-              <a:effectLst/>
-              <a:latin typeface="DinaRemasterII"/>
-            </a:endParaRPr>
-          </a:p>
-          <a:p>
-            <a:pPr>
-              <a:lnSpc>
-                <a:spcPts val="1650"/>
-              </a:lnSpc>
-              <a:buNone/>
-            </a:pPr>
-            <a:endParaRPr lang="en-US" b="0" dirty="0">
-              <a:effectLst/>
-              <a:latin typeface="DinaRemasterII"/>
-            </a:endParaRPr>
-          </a:p>
-          <a:p>
-            <a:pPr>
-              <a:lnSpc>
-                <a:spcPts val="1650"/>
-              </a:lnSpc>
-              <a:buNone/>
-            </a:pPr>
-            <a:r>
-              <a:rPr lang="ru-RU" b="0" dirty="0">
-                <a:effectLst/>
-                <a:latin typeface="DinaRemasterII"/>
-              </a:rPr>
-              <a:t>Класс </a:t>
-            </a:r>
-            <a:r>
-              <a:rPr lang="ru-RU" b="1" i="1" dirty="0">
-                <a:effectLst/>
-                <a:latin typeface="DinaRemasterII"/>
-              </a:rPr>
-              <a:t>Renderer</a:t>
-            </a:r>
-            <a:r>
-              <a:rPr lang="ru-RU" b="0" dirty="0">
-                <a:effectLst/>
-                <a:latin typeface="DinaRemasterII"/>
-              </a:rPr>
-              <a:t> осуществляет формирование изображения сцены (Scene) с позиции камеры (Camera) и записывает результат в выходной буфер (Canvas). Этот класс выполняет роль централь</a:t>
-            </a:r>
-            <a:r>
-              <a:rPr lang="ru-RU" dirty="0">
-                <a:latin typeface="DinaRemasterII"/>
-              </a:rPr>
-              <a:t>н</a:t>
-            </a:r>
-            <a:r>
-              <a:rPr lang="ru-RU" b="0" dirty="0">
-                <a:effectLst/>
-                <a:latin typeface="DinaRemasterII"/>
-              </a:rPr>
-              <a:t>ого модуля, обеспечивая взаимодействии всех остальных компонентов системы.</a:t>
-            </a:r>
+              <a:rPr lang="ru-RU" dirty="0"/>
+              <a:t>Средства реализации</a:t>
+            </a:r>
+            <a:r>
+              <a:rPr lang="en-US" dirty="0"/>
+              <a:t>:</a:t>
+            </a:r>
+            <a:endParaRPr lang="ru-RU" dirty="0"/>
+          </a:p>
+          <a:p>
+            <a:pPr lvl="1"/>
+            <a:r>
+              <a:rPr lang="ru-RU" dirty="0"/>
+              <a:t>Язык программирования</a:t>
+            </a:r>
+            <a:r>
+              <a:rPr lang="en-US" dirty="0"/>
+              <a:t>: C++</a:t>
+            </a:r>
+          </a:p>
+          <a:p>
+            <a:pPr lvl="1"/>
+            <a:r>
+              <a:rPr lang="ru-RU" dirty="0"/>
+              <a:t>Графическая библиотека</a:t>
+            </a:r>
+            <a:r>
+              <a:rPr lang="en-US" dirty="0"/>
+              <a:t>: SFML</a:t>
+            </a:r>
+          </a:p>
+          <a:p>
+            <a:pPr lvl="1"/>
+            <a:r>
+              <a:rPr lang="en-US" dirty="0"/>
+              <a:t>GUI </a:t>
+            </a:r>
+            <a:r>
+              <a:rPr lang="ru-RU" dirty="0"/>
+              <a:t>библиотека</a:t>
+            </a:r>
+            <a:r>
+              <a:rPr lang="en-US" dirty="0"/>
+              <a:t>: Dear ImGui</a:t>
+            </a:r>
+            <a:endParaRPr lang="ru-RU" dirty="0"/>
           </a:p>
         </p:txBody>
       </p:sp>
@@ -7428,7 +7564,7 @@
           <p:cNvPr id="6" name="Номер слайда 5">
             <a:extLst>
               <a:ext uri="{FF2B5EF4-FFF2-40B4-BE49-F238E27FC236}">
-                <a16:creationId xmlns:a16="http://schemas.microsoft.com/office/drawing/2014/main" id="{D143E6EA-538A-5F39-9A44-746591DA2E8E}"/>
+                <a16:creationId xmlns:a16="http://schemas.microsoft.com/office/drawing/2014/main" id="{1705C54C-2674-CAF6-8EA7-E630AC9F846F}"/>
               </a:ext>
             </a:extLst>
           </p:cNvPr>
@@ -7455,7 +7591,7 @@
     </p:spTree>
     <p:extLst>
       <p:ext uri="{BB962C8B-B14F-4D97-AF65-F5344CB8AC3E}">
-        <p14:creationId xmlns:p14="http://schemas.microsoft.com/office/powerpoint/2010/main" val="740036979"/>
+        <p14:creationId xmlns:p14="http://schemas.microsoft.com/office/powerpoint/2010/main" val="242748196"/>
       </p:ext>
     </p:extLst>
   </p:cSld>
